--- a/ゲーム科1年/00_前期/ゲームプログラミングⅠ/06_画像の複数表示.pptx
+++ b/ゲーム科1年/00_前期/ゲームプログラミングⅠ/06_画像の複数表示.pptx
@@ -266,7 +266,7 @@
           <a:p>
             <a:fld id="{E9CC885B-4903-4D54-9A93-00025F12DED9}" type="datetimeFigureOut">
               <a:rPr kumimoji="1" lang="ja-JP" altLang="en-US" smtClean="0"/>
-              <a:t>2024/9/4</a:t>
+              <a:t>2025/1/6</a:t>
             </a:fld>
             <a:endParaRPr kumimoji="1" lang="ja-JP" altLang="en-US"/>
           </a:p>
@@ -496,7 +496,7 @@
           <a:p>
             <a:fld id="{E9CC885B-4903-4D54-9A93-00025F12DED9}" type="datetimeFigureOut">
               <a:rPr kumimoji="1" lang="ja-JP" altLang="en-US" smtClean="0"/>
-              <a:t>2024/9/4</a:t>
+              <a:t>2025/1/6</a:t>
             </a:fld>
             <a:endParaRPr kumimoji="1" lang="ja-JP" altLang="en-US"/>
           </a:p>
@@ -736,7 +736,7 @@
           <a:p>
             <a:fld id="{E9CC885B-4903-4D54-9A93-00025F12DED9}" type="datetimeFigureOut">
               <a:rPr kumimoji="1" lang="ja-JP" altLang="en-US" smtClean="0"/>
-              <a:t>2024/9/4</a:t>
+              <a:t>2025/1/6</a:t>
             </a:fld>
             <a:endParaRPr kumimoji="1" lang="ja-JP" altLang="en-US"/>
           </a:p>
@@ -966,7 +966,7 @@
           <a:p>
             <a:fld id="{E9CC885B-4903-4D54-9A93-00025F12DED9}" type="datetimeFigureOut">
               <a:rPr kumimoji="1" lang="ja-JP" altLang="en-US" smtClean="0"/>
-              <a:t>2024/9/4</a:t>
+              <a:t>2025/1/6</a:t>
             </a:fld>
             <a:endParaRPr kumimoji="1" lang="ja-JP" altLang="en-US"/>
           </a:p>
@@ -1241,7 +1241,7 @@
           <a:p>
             <a:fld id="{E9CC885B-4903-4D54-9A93-00025F12DED9}" type="datetimeFigureOut">
               <a:rPr kumimoji="1" lang="ja-JP" altLang="en-US" smtClean="0"/>
-              <a:t>2024/9/4</a:t>
+              <a:t>2025/1/6</a:t>
             </a:fld>
             <a:endParaRPr kumimoji="1" lang="ja-JP" altLang="en-US"/>
           </a:p>
@@ -1570,7 +1570,7 @@
           <a:p>
             <a:fld id="{E9CC885B-4903-4D54-9A93-00025F12DED9}" type="datetimeFigureOut">
               <a:rPr kumimoji="1" lang="ja-JP" altLang="en-US" smtClean="0"/>
-              <a:t>2024/9/4</a:t>
+              <a:t>2025/1/6</a:t>
             </a:fld>
             <a:endParaRPr kumimoji="1" lang="ja-JP" altLang="en-US"/>
           </a:p>
@@ -2046,7 +2046,7 @@
           <a:p>
             <a:fld id="{E9CC885B-4903-4D54-9A93-00025F12DED9}" type="datetimeFigureOut">
               <a:rPr kumimoji="1" lang="ja-JP" altLang="en-US" smtClean="0"/>
-              <a:t>2024/9/4</a:t>
+              <a:t>2025/1/6</a:t>
             </a:fld>
             <a:endParaRPr kumimoji="1" lang="ja-JP" altLang="en-US"/>
           </a:p>
@@ -2187,7 +2187,7 @@
           <a:p>
             <a:fld id="{E9CC885B-4903-4D54-9A93-00025F12DED9}" type="datetimeFigureOut">
               <a:rPr kumimoji="1" lang="ja-JP" altLang="en-US" smtClean="0"/>
-              <a:t>2024/9/4</a:t>
+              <a:t>2025/1/6</a:t>
             </a:fld>
             <a:endParaRPr kumimoji="1" lang="ja-JP" altLang="en-US"/>
           </a:p>
@@ -2300,7 +2300,7 @@
           <a:p>
             <a:fld id="{E9CC885B-4903-4D54-9A93-00025F12DED9}" type="datetimeFigureOut">
               <a:rPr kumimoji="1" lang="ja-JP" altLang="en-US" smtClean="0"/>
-              <a:t>2024/9/4</a:t>
+              <a:t>2025/1/6</a:t>
             </a:fld>
             <a:endParaRPr kumimoji="1" lang="ja-JP" altLang="en-US"/>
           </a:p>
@@ -2643,7 +2643,7 @@
           <a:p>
             <a:fld id="{E9CC885B-4903-4D54-9A93-00025F12DED9}" type="datetimeFigureOut">
               <a:rPr kumimoji="1" lang="ja-JP" altLang="en-US" smtClean="0"/>
-              <a:t>2024/9/4</a:t>
+              <a:t>2025/1/6</a:t>
             </a:fld>
             <a:endParaRPr kumimoji="1" lang="ja-JP" altLang="en-US"/>
           </a:p>
@@ -2931,7 +2931,7 @@
           <a:p>
             <a:fld id="{E9CC885B-4903-4D54-9A93-00025F12DED9}" type="datetimeFigureOut">
               <a:rPr kumimoji="1" lang="ja-JP" altLang="en-US" smtClean="0"/>
-              <a:t>2024/9/4</a:t>
+              <a:t>2025/1/6</a:t>
             </a:fld>
             <a:endParaRPr kumimoji="1" lang="ja-JP" altLang="en-US"/>
           </a:p>
@@ -3204,7 +3204,7 @@
           <a:p>
             <a:fld id="{E9CC885B-4903-4D54-9A93-00025F12DED9}" type="datetimeFigureOut">
               <a:rPr kumimoji="1" lang="ja-JP" altLang="en-US" smtClean="0"/>
-              <a:t>2024/9/4</a:t>
+              <a:t>2025/1/6</a:t>
             </a:fld>
             <a:endParaRPr kumimoji="1" lang="ja-JP" altLang="en-US"/>
           </a:p>
@@ -4143,10 +4143,10 @@
       </p:sp>
       <p:pic>
         <p:nvPicPr>
-          <p:cNvPr id="5" name="図 4">
-            <a:extLst>
-              <a:ext uri="{FF2B5EF4-FFF2-40B4-BE49-F238E27FC236}">
-                <a16:creationId xmlns:a16="http://schemas.microsoft.com/office/drawing/2014/main" id="{2DE90DF3-7ECB-4147-A109-6E5E4ECB5638}"/>
+          <p:cNvPr id="3" name="図 2">
+            <a:extLst>
+              <a:ext uri="{FF2B5EF4-FFF2-40B4-BE49-F238E27FC236}">
+                <a16:creationId xmlns:a16="http://schemas.microsoft.com/office/drawing/2014/main" id="{44CAF2B8-F217-4E12-AF00-006E328C4A64}"/>
               </a:ext>
             </a:extLst>
           </p:cNvPr>
@@ -4156,21 +4156,15 @@
           <p:nvPr/>
         </p:nvPicPr>
         <p:blipFill>
-          <a:blip r:embed="rId2">
-            <a:extLst>
-              <a:ext uri="{28A0092B-C50C-407E-A947-70E740481C1C}">
-                <a14:useLocalDpi xmlns:a14="http://schemas.microsoft.com/office/drawing/2010/main" val="0"/>
-              </a:ext>
-            </a:extLst>
-          </a:blip>
+          <a:blip r:embed="rId2"/>
           <a:stretch>
             <a:fillRect/>
           </a:stretch>
         </p:blipFill>
         <p:spPr>
           <a:xfrm>
-            <a:off x="567543" y="1817794"/>
-            <a:ext cx="7439178" cy="4671906"/>
+            <a:off x="567542" y="1817794"/>
+            <a:ext cx="7544853" cy="4677428"/>
           </a:xfrm>
           <a:prstGeom prst="rect">
             <a:avLst/>
@@ -4179,10 +4173,10 @@
       </p:pic>
       <p:sp>
         <p:nvSpPr>
-          <p:cNvPr id="7" name="テキスト ボックス 6">
-            <a:extLst>
-              <a:ext uri="{FF2B5EF4-FFF2-40B4-BE49-F238E27FC236}">
-                <a16:creationId xmlns:a16="http://schemas.microsoft.com/office/drawing/2014/main" id="{37965832-5359-469B-89CA-539B0A547B24}"/>
+          <p:cNvPr id="10" name="テキスト ボックス 9">
+            <a:extLst>
+              <a:ext uri="{FF2B5EF4-FFF2-40B4-BE49-F238E27FC236}">
+                <a16:creationId xmlns:a16="http://schemas.microsoft.com/office/drawing/2014/main" id="{5F41172C-EF22-4FD2-A9AD-1D1ADCADAE53}"/>
               </a:ext>
             </a:extLst>
           </p:cNvPr>
@@ -4191,7 +4185,7 @@
         </p:nvSpPr>
         <p:spPr>
           <a:xfrm>
-            <a:off x="6384142" y="4610100"/>
+            <a:off x="6515367" y="4711700"/>
             <a:ext cx="5109091" cy="830997"/>
           </a:xfrm>
           <a:prstGeom prst="rect">

--- a/ゲーム科1年/00_前期/ゲームプログラミングⅠ/06_画像の複数表示.pptx
+++ b/ゲーム科1年/00_前期/ゲームプログラミングⅠ/06_画像の複数表示.pptx
@@ -266,7 +266,7 @@
           <a:p>
             <a:fld id="{E9CC885B-4903-4D54-9A93-00025F12DED9}" type="datetimeFigureOut">
               <a:rPr kumimoji="1" lang="ja-JP" altLang="en-US" smtClean="0"/>
-              <a:t>2025/1/6</a:t>
+              <a:t>2025/3/3</a:t>
             </a:fld>
             <a:endParaRPr kumimoji="1" lang="ja-JP" altLang="en-US"/>
           </a:p>
@@ -496,7 +496,7 @@
           <a:p>
             <a:fld id="{E9CC885B-4903-4D54-9A93-00025F12DED9}" type="datetimeFigureOut">
               <a:rPr kumimoji="1" lang="ja-JP" altLang="en-US" smtClean="0"/>
-              <a:t>2025/1/6</a:t>
+              <a:t>2025/3/3</a:t>
             </a:fld>
             <a:endParaRPr kumimoji="1" lang="ja-JP" altLang="en-US"/>
           </a:p>
@@ -736,7 +736,7 @@
           <a:p>
             <a:fld id="{E9CC885B-4903-4D54-9A93-00025F12DED9}" type="datetimeFigureOut">
               <a:rPr kumimoji="1" lang="ja-JP" altLang="en-US" smtClean="0"/>
-              <a:t>2025/1/6</a:t>
+              <a:t>2025/3/3</a:t>
             </a:fld>
             <a:endParaRPr kumimoji="1" lang="ja-JP" altLang="en-US"/>
           </a:p>
@@ -966,7 +966,7 @@
           <a:p>
             <a:fld id="{E9CC885B-4903-4D54-9A93-00025F12DED9}" type="datetimeFigureOut">
               <a:rPr kumimoji="1" lang="ja-JP" altLang="en-US" smtClean="0"/>
-              <a:t>2025/1/6</a:t>
+              <a:t>2025/3/3</a:t>
             </a:fld>
             <a:endParaRPr kumimoji="1" lang="ja-JP" altLang="en-US"/>
           </a:p>
@@ -1241,7 +1241,7 @@
           <a:p>
             <a:fld id="{E9CC885B-4903-4D54-9A93-00025F12DED9}" type="datetimeFigureOut">
               <a:rPr kumimoji="1" lang="ja-JP" altLang="en-US" smtClean="0"/>
-              <a:t>2025/1/6</a:t>
+              <a:t>2025/3/3</a:t>
             </a:fld>
             <a:endParaRPr kumimoji="1" lang="ja-JP" altLang="en-US"/>
           </a:p>
@@ -1570,7 +1570,7 @@
           <a:p>
             <a:fld id="{E9CC885B-4903-4D54-9A93-00025F12DED9}" type="datetimeFigureOut">
               <a:rPr kumimoji="1" lang="ja-JP" altLang="en-US" smtClean="0"/>
-              <a:t>2025/1/6</a:t>
+              <a:t>2025/3/3</a:t>
             </a:fld>
             <a:endParaRPr kumimoji="1" lang="ja-JP" altLang="en-US"/>
           </a:p>
@@ -2046,7 +2046,7 @@
           <a:p>
             <a:fld id="{E9CC885B-4903-4D54-9A93-00025F12DED9}" type="datetimeFigureOut">
               <a:rPr kumimoji="1" lang="ja-JP" altLang="en-US" smtClean="0"/>
-              <a:t>2025/1/6</a:t>
+              <a:t>2025/3/3</a:t>
             </a:fld>
             <a:endParaRPr kumimoji="1" lang="ja-JP" altLang="en-US"/>
           </a:p>
@@ -2187,7 +2187,7 @@
           <a:p>
             <a:fld id="{E9CC885B-4903-4D54-9A93-00025F12DED9}" type="datetimeFigureOut">
               <a:rPr kumimoji="1" lang="ja-JP" altLang="en-US" smtClean="0"/>
-              <a:t>2025/1/6</a:t>
+              <a:t>2025/3/3</a:t>
             </a:fld>
             <a:endParaRPr kumimoji="1" lang="ja-JP" altLang="en-US"/>
           </a:p>
@@ -2300,7 +2300,7 @@
           <a:p>
             <a:fld id="{E9CC885B-4903-4D54-9A93-00025F12DED9}" type="datetimeFigureOut">
               <a:rPr kumimoji="1" lang="ja-JP" altLang="en-US" smtClean="0"/>
-              <a:t>2025/1/6</a:t>
+              <a:t>2025/3/3</a:t>
             </a:fld>
             <a:endParaRPr kumimoji="1" lang="ja-JP" altLang="en-US"/>
           </a:p>
@@ -2643,7 +2643,7 @@
           <a:p>
             <a:fld id="{E9CC885B-4903-4D54-9A93-00025F12DED9}" type="datetimeFigureOut">
               <a:rPr kumimoji="1" lang="ja-JP" altLang="en-US" smtClean="0"/>
-              <a:t>2025/1/6</a:t>
+              <a:t>2025/3/3</a:t>
             </a:fld>
             <a:endParaRPr kumimoji="1" lang="ja-JP" altLang="en-US"/>
           </a:p>
@@ -2931,7 +2931,7 @@
           <a:p>
             <a:fld id="{E9CC885B-4903-4D54-9A93-00025F12DED9}" type="datetimeFigureOut">
               <a:rPr kumimoji="1" lang="ja-JP" altLang="en-US" smtClean="0"/>
-              <a:t>2025/1/6</a:t>
+              <a:t>2025/3/3</a:t>
             </a:fld>
             <a:endParaRPr kumimoji="1" lang="ja-JP" altLang="en-US"/>
           </a:p>
@@ -3204,7 +3204,7 @@
           <a:p>
             <a:fld id="{E9CC885B-4903-4D54-9A93-00025F12DED9}" type="datetimeFigureOut">
               <a:rPr kumimoji="1" lang="ja-JP" altLang="en-US" smtClean="0"/>
-              <a:t>2025/1/6</a:t>
+              <a:t>2025/3/3</a:t>
             </a:fld>
             <a:endParaRPr kumimoji="1" lang="ja-JP" altLang="en-US"/>
           </a:p>
@@ -3870,6 +3870,58 @@
           </a:prstGeom>
         </p:spPr>
       </p:pic>
+      <p:sp>
+        <p:nvSpPr>
+          <p:cNvPr id="2" name="正方形/長方形 1">
+            <a:extLst>
+              <a:ext uri="{FF2B5EF4-FFF2-40B4-BE49-F238E27FC236}">
+                <a16:creationId xmlns:a16="http://schemas.microsoft.com/office/drawing/2014/main" id="{20C5F390-8870-45A5-BC82-2350E42D5C2F}"/>
+              </a:ext>
+            </a:extLst>
+          </p:cNvPr>
+          <p:cNvSpPr/>
+          <p:nvPr/>
+        </p:nvSpPr>
+        <p:spPr>
+          <a:xfrm>
+            <a:off x="1954306" y="3429000"/>
+            <a:ext cx="6033247" cy="1259541"/>
+          </a:xfrm>
+          <a:prstGeom prst="rect">
+            <a:avLst/>
+          </a:prstGeom>
+          <a:noFill/>
+          <a:ln w="38100">
+            <a:solidFill>
+              <a:srgbClr val="FF0000"/>
+            </a:solidFill>
+          </a:ln>
+        </p:spPr>
+        <p:style>
+          <a:lnRef idx="2">
+            <a:schemeClr val="accent1">
+              <a:shade val="50000"/>
+            </a:schemeClr>
+          </a:lnRef>
+          <a:fillRef idx="1">
+            <a:schemeClr val="accent1"/>
+          </a:fillRef>
+          <a:effectRef idx="0">
+            <a:schemeClr val="accent1"/>
+          </a:effectRef>
+          <a:fontRef idx="minor">
+            <a:schemeClr val="lt1"/>
+          </a:fontRef>
+        </p:style>
+        <p:txBody>
+          <a:bodyPr rtlCol="0" anchor="ctr"/>
+          <a:lstStyle/>
+          <a:p>
+            <a:pPr algn="ctr"/>
+            <a:endParaRPr kumimoji="1" lang="ja-JP" altLang="en-US"/>
+          </a:p>
+        </p:txBody>
+      </p:sp>
     </p:spTree>
     <p:extLst>
       <p:ext uri="{BB962C8B-B14F-4D97-AF65-F5344CB8AC3E}">
@@ -4130,12 +4182,24 @@
           <a:lstStyle/>
           <a:p>
             <a:r>
-              <a:rPr lang="en-US" altLang="ja-JP" sz="2400" dirty="0"/>
+              <a:rPr lang="en-US" altLang="ja-JP" sz="2400" b="1" dirty="0">
+                <a:solidFill>
+                  <a:srgbClr val="0070C0"/>
+                </a:solidFill>
+              </a:rPr>
               <a:t>for</a:t>
             </a:r>
             <a:r>
+              <a:rPr lang="ja-JP" altLang="en-US" sz="2400" b="1" dirty="0">
+                <a:solidFill>
+                  <a:srgbClr val="0070C0"/>
+                </a:solidFill>
+              </a:rPr>
+              <a:t>文</a:t>
+            </a:r>
+            <a:r>
               <a:rPr lang="ja-JP" altLang="en-US" sz="2400" dirty="0"/>
-              <a:t>文で雲の数だけ初期化しましょう。</a:t>
+              <a:t>で雲の数だけ初期化しましょう。</a:t>
             </a:r>
             <a:endParaRPr kumimoji="1" lang="en-US" altLang="ja-JP" sz="2400" dirty="0"/>
           </a:p>
@@ -4318,12 +4382,24 @@
           <a:lstStyle/>
           <a:p>
             <a:r>
-              <a:rPr lang="en-US" altLang="ja-JP" sz="2400" dirty="0"/>
+              <a:rPr lang="en-US" altLang="ja-JP" sz="2400" b="1" dirty="0">
+                <a:solidFill>
+                  <a:srgbClr val="0070C0"/>
+                </a:solidFill>
+              </a:rPr>
               <a:t>for</a:t>
             </a:r>
             <a:r>
+              <a:rPr lang="ja-JP" altLang="en-US" sz="2400" b="1" dirty="0">
+                <a:solidFill>
+                  <a:srgbClr val="0070C0"/>
+                </a:solidFill>
+              </a:rPr>
+              <a:t>文</a:t>
+            </a:r>
+            <a:r>
               <a:rPr lang="ja-JP" altLang="en-US" sz="2400" dirty="0"/>
-              <a:t>文で雲の数だけ移動しましょう。</a:t>
+              <a:t>で雲の数だけ移動しましょう。</a:t>
             </a:r>
             <a:endParaRPr kumimoji="1" lang="en-US" altLang="ja-JP" sz="2400" dirty="0"/>
           </a:p>
@@ -4464,12 +4540,24 @@
           <a:lstStyle/>
           <a:p>
             <a:r>
-              <a:rPr lang="en-US" altLang="ja-JP" sz="2400" dirty="0"/>
+              <a:rPr lang="en-US" altLang="ja-JP" sz="2400" b="1" dirty="0">
+                <a:solidFill>
+                  <a:srgbClr val="0070C0"/>
+                </a:solidFill>
+              </a:rPr>
               <a:t>for</a:t>
             </a:r>
             <a:r>
+              <a:rPr lang="ja-JP" altLang="en-US" sz="2400" b="1" dirty="0">
+                <a:solidFill>
+                  <a:srgbClr val="0070C0"/>
+                </a:solidFill>
+              </a:rPr>
+              <a:t>文</a:t>
+            </a:r>
+            <a:r>
               <a:rPr lang="ja-JP" altLang="en-US" sz="2400" dirty="0"/>
-              <a:t>文で雲の数だけ描画しましょう。</a:t>
+              <a:t>で雲の数だけ描画しましょう。</a:t>
             </a:r>
             <a:endParaRPr kumimoji="1" lang="en-US" altLang="ja-JP" sz="2400" dirty="0"/>
           </a:p>
@@ -4610,12 +4698,24 @@
           <a:lstStyle/>
           <a:p>
             <a:r>
-              <a:rPr lang="en-US" altLang="ja-JP" sz="2400" dirty="0"/>
+              <a:rPr lang="en-US" altLang="ja-JP" sz="2400" b="1" dirty="0">
+                <a:solidFill>
+                  <a:srgbClr val="0070C0"/>
+                </a:solidFill>
+              </a:rPr>
               <a:t>for</a:t>
             </a:r>
             <a:r>
+              <a:rPr lang="ja-JP" altLang="en-US" sz="2400" b="1" dirty="0">
+                <a:solidFill>
+                  <a:srgbClr val="0070C0"/>
+                </a:solidFill>
+              </a:rPr>
+              <a:t>文</a:t>
+            </a:r>
+            <a:r>
               <a:rPr lang="ja-JP" altLang="en-US" sz="2400" dirty="0"/>
-              <a:t>文で雲の数だけ削除しましょう。</a:t>
+              <a:t>で雲の数だけ削除しましょう。</a:t>
             </a:r>
             <a:endParaRPr kumimoji="1" lang="en-US" altLang="ja-JP" sz="2400" dirty="0"/>
           </a:p>

--- a/ゲーム科1年/00_前期/ゲームプログラミングⅠ/06_画像の複数表示.pptx
+++ b/ゲーム科1年/00_前期/ゲームプログラミングⅠ/06_画像の複数表示.pptx
@@ -266,7 +266,7 @@
           <a:p>
             <a:fld id="{E9CC885B-4903-4D54-9A93-00025F12DED9}" type="datetimeFigureOut">
               <a:rPr kumimoji="1" lang="ja-JP" altLang="en-US" smtClean="0"/>
-              <a:t>2025/3/3</a:t>
+              <a:t>2026/6/4</a:t>
             </a:fld>
             <a:endParaRPr kumimoji="1" lang="ja-JP" altLang="en-US"/>
           </a:p>
@@ -496,7 +496,7 @@
           <a:p>
             <a:fld id="{E9CC885B-4903-4D54-9A93-00025F12DED9}" type="datetimeFigureOut">
               <a:rPr kumimoji="1" lang="ja-JP" altLang="en-US" smtClean="0"/>
-              <a:t>2025/3/3</a:t>
+              <a:t>2026/6/4</a:t>
             </a:fld>
             <a:endParaRPr kumimoji="1" lang="ja-JP" altLang="en-US"/>
           </a:p>
@@ -736,7 +736,7 @@
           <a:p>
             <a:fld id="{E9CC885B-4903-4D54-9A93-00025F12DED9}" type="datetimeFigureOut">
               <a:rPr kumimoji="1" lang="ja-JP" altLang="en-US" smtClean="0"/>
-              <a:t>2025/3/3</a:t>
+              <a:t>2026/6/4</a:t>
             </a:fld>
             <a:endParaRPr kumimoji="1" lang="ja-JP" altLang="en-US"/>
           </a:p>
@@ -966,7 +966,7 @@
           <a:p>
             <a:fld id="{E9CC885B-4903-4D54-9A93-00025F12DED9}" type="datetimeFigureOut">
               <a:rPr kumimoji="1" lang="ja-JP" altLang="en-US" smtClean="0"/>
-              <a:t>2025/3/3</a:t>
+              <a:t>2026/6/4</a:t>
             </a:fld>
             <a:endParaRPr kumimoji="1" lang="ja-JP" altLang="en-US"/>
           </a:p>
@@ -1241,7 +1241,7 @@
           <a:p>
             <a:fld id="{E9CC885B-4903-4D54-9A93-00025F12DED9}" type="datetimeFigureOut">
               <a:rPr kumimoji="1" lang="ja-JP" altLang="en-US" smtClean="0"/>
-              <a:t>2025/3/3</a:t>
+              <a:t>2026/6/4</a:t>
             </a:fld>
             <a:endParaRPr kumimoji="1" lang="ja-JP" altLang="en-US"/>
           </a:p>
@@ -1570,7 +1570,7 @@
           <a:p>
             <a:fld id="{E9CC885B-4903-4D54-9A93-00025F12DED9}" type="datetimeFigureOut">
               <a:rPr kumimoji="1" lang="ja-JP" altLang="en-US" smtClean="0"/>
-              <a:t>2025/3/3</a:t>
+              <a:t>2026/6/4</a:t>
             </a:fld>
             <a:endParaRPr kumimoji="1" lang="ja-JP" altLang="en-US"/>
           </a:p>
@@ -2046,7 +2046,7 @@
           <a:p>
             <a:fld id="{E9CC885B-4903-4D54-9A93-00025F12DED9}" type="datetimeFigureOut">
               <a:rPr kumimoji="1" lang="ja-JP" altLang="en-US" smtClean="0"/>
-              <a:t>2025/3/3</a:t>
+              <a:t>2026/6/4</a:t>
             </a:fld>
             <a:endParaRPr kumimoji="1" lang="ja-JP" altLang="en-US"/>
           </a:p>
@@ -2187,7 +2187,7 @@
           <a:p>
             <a:fld id="{E9CC885B-4903-4D54-9A93-00025F12DED9}" type="datetimeFigureOut">
               <a:rPr kumimoji="1" lang="ja-JP" altLang="en-US" smtClean="0"/>
-              <a:t>2025/3/3</a:t>
+              <a:t>2026/6/4</a:t>
             </a:fld>
             <a:endParaRPr kumimoji="1" lang="ja-JP" altLang="en-US"/>
           </a:p>
@@ -2300,7 +2300,7 @@
           <a:p>
             <a:fld id="{E9CC885B-4903-4D54-9A93-00025F12DED9}" type="datetimeFigureOut">
               <a:rPr kumimoji="1" lang="ja-JP" altLang="en-US" smtClean="0"/>
-              <a:t>2025/3/3</a:t>
+              <a:t>2026/6/4</a:t>
             </a:fld>
             <a:endParaRPr kumimoji="1" lang="ja-JP" altLang="en-US"/>
           </a:p>
@@ -2643,7 +2643,7 @@
           <a:p>
             <a:fld id="{E9CC885B-4903-4D54-9A93-00025F12DED9}" type="datetimeFigureOut">
               <a:rPr kumimoji="1" lang="ja-JP" altLang="en-US" smtClean="0"/>
-              <a:t>2025/3/3</a:t>
+              <a:t>2026/6/4</a:t>
             </a:fld>
             <a:endParaRPr kumimoji="1" lang="ja-JP" altLang="en-US"/>
           </a:p>
@@ -2931,7 +2931,7 @@
           <a:p>
             <a:fld id="{E9CC885B-4903-4D54-9A93-00025F12DED9}" type="datetimeFigureOut">
               <a:rPr kumimoji="1" lang="ja-JP" altLang="en-US" smtClean="0"/>
-              <a:t>2025/3/3</a:t>
+              <a:t>2026/6/4</a:t>
             </a:fld>
             <a:endParaRPr kumimoji="1" lang="ja-JP" altLang="en-US"/>
           </a:p>
@@ -3204,7 +3204,7 @@
           <a:p>
             <a:fld id="{E9CC885B-4903-4D54-9A93-00025F12DED9}" type="datetimeFigureOut">
               <a:rPr kumimoji="1" lang="ja-JP" altLang="en-US" smtClean="0"/>
-              <a:t>2025/3/3</a:t>
+              <a:t>2026/6/4</a:t>
             </a:fld>
             <a:endParaRPr kumimoji="1" lang="ja-JP" altLang="en-US"/>
           </a:p>
@@ -3922,6 +3922,65 @@
           </a:p>
         </p:txBody>
       </p:sp>
+      <p:sp>
+        <p:nvSpPr>
+          <p:cNvPr id="7" name="テキスト ボックス 6">
+            <a:extLst>
+              <a:ext uri="{FF2B5EF4-FFF2-40B4-BE49-F238E27FC236}">
+                <a16:creationId xmlns:a16="http://schemas.microsoft.com/office/drawing/2014/main" id="{18BDC9BB-8993-4CDA-94DE-DFC8BD1FBCEF}"/>
+              </a:ext>
+            </a:extLst>
+          </p:cNvPr>
+          <p:cNvSpPr txBox="1"/>
+          <p:nvPr/>
+        </p:nvSpPr>
+        <p:spPr>
+          <a:xfrm>
+            <a:off x="567542" y="5017962"/>
+            <a:ext cx="9110186" cy="830997"/>
+          </a:xfrm>
+          <a:prstGeom prst="rect">
+            <a:avLst/>
+          </a:prstGeom>
+          <a:noFill/>
+        </p:spPr>
+        <p:txBody>
+          <a:bodyPr wrap="none" rtlCol="0">
+            <a:spAutoFit/>
+          </a:bodyPr>
+          <a:lstStyle/>
+          <a:p>
+            <a:r>
+              <a:rPr kumimoji="1" lang="ja-JP" altLang="en-US" sz="2400" dirty="0"/>
+              <a:t>このように</a:t>
+            </a:r>
+            <a:r>
+              <a:rPr kumimoji="1" lang="ja-JP" altLang="en-US" sz="2400" b="1" dirty="0">
+                <a:solidFill>
+                  <a:srgbClr val="FF0000"/>
+                </a:solidFill>
+              </a:rPr>
+              <a:t>ゲーム中に絶対に変わらない固定値</a:t>
+            </a:r>
+            <a:r>
+              <a:rPr kumimoji="1" lang="ja-JP" altLang="en-US" sz="2400" dirty="0"/>
+              <a:t>を宣言するのに、</a:t>
+            </a:r>
+            <a:endParaRPr kumimoji="1" lang="en-US" altLang="ja-JP" sz="2400" dirty="0"/>
+          </a:p>
+          <a:p>
+            <a:r>
+              <a:rPr lang="en-US" altLang="ja-JP" sz="2400" b="1" dirty="0"/>
+              <a:t>#define</a:t>
+            </a:r>
+            <a:r>
+              <a:rPr lang="ja-JP" altLang="en-US" sz="2400" dirty="0"/>
+              <a:t>が使用されます。</a:t>
+            </a:r>
+            <a:endParaRPr kumimoji="1" lang="en-US" altLang="ja-JP" sz="2400" dirty="0"/>
+          </a:p>
+        </p:txBody>
+      </p:sp>
     </p:spTree>
     <p:extLst>
       <p:ext uri="{BB962C8B-B14F-4D97-AF65-F5344CB8AC3E}">

--- a/ゲーム科1年/00_前期/ゲームプログラミングⅠ/06_画像の複数表示.pptx
+++ b/ゲーム科1年/00_前期/ゲームプログラミングⅠ/06_画像の複数表示.pptx
@@ -266,7 +266,7 @@
           <a:p>
             <a:fld id="{E9CC885B-4903-4D54-9A93-00025F12DED9}" type="datetimeFigureOut">
               <a:rPr kumimoji="1" lang="ja-JP" altLang="en-US" smtClean="0"/>
-              <a:t>2026/6/4</a:t>
+              <a:t>2026/6/22</a:t>
             </a:fld>
             <a:endParaRPr kumimoji="1" lang="ja-JP" altLang="en-US"/>
           </a:p>
@@ -496,7 +496,7 @@
           <a:p>
             <a:fld id="{E9CC885B-4903-4D54-9A93-00025F12DED9}" type="datetimeFigureOut">
               <a:rPr kumimoji="1" lang="ja-JP" altLang="en-US" smtClean="0"/>
-              <a:t>2026/6/4</a:t>
+              <a:t>2026/6/22</a:t>
             </a:fld>
             <a:endParaRPr kumimoji="1" lang="ja-JP" altLang="en-US"/>
           </a:p>
@@ -736,7 +736,7 @@
           <a:p>
             <a:fld id="{E9CC885B-4903-4D54-9A93-00025F12DED9}" type="datetimeFigureOut">
               <a:rPr kumimoji="1" lang="ja-JP" altLang="en-US" smtClean="0"/>
-              <a:t>2026/6/4</a:t>
+              <a:t>2026/6/22</a:t>
             </a:fld>
             <a:endParaRPr kumimoji="1" lang="ja-JP" altLang="en-US"/>
           </a:p>
@@ -966,7 +966,7 @@
           <a:p>
             <a:fld id="{E9CC885B-4903-4D54-9A93-00025F12DED9}" type="datetimeFigureOut">
               <a:rPr kumimoji="1" lang="ja-JP" altLang="en-US" smtClean="0"/>
-              <a:t>2026/6/4</a:t>
+              <a:t>2026/6/22</a:t>
             </a:fld>
             <a:endParaRPr kumimoji="1" lang="ja-JP" altLang="en-US"/>
           </a:p>
@@ -1241,7 +1241,7 @@
           <a:p>
             <a:fld id="{E9CC885B-4903-4D54-9A93-00025F12DED9}" type="datetimeFigureOut">
               <a:rPr kumimoji="1" lang="ja-JP" altLang="en-US" smtClean="0"/>
-              <a:t>2026/6/4</a:t>
+              <a:t>2026/6/22</a:t>
             </a:fld>
             <a:endParaRPr kumimoji="1" lang="ja-JP" altLang="en-US"/>
           </a:p>
@@ -1570,7 +1570,7 @@
           <a:p>
             <a:fld id="{E9CC885B-4903-4D54-9A93-00025F12DED9}" type="datetimeFigureOut">
               <a:rPr kumimoji="1" lang="ja-JP" altLang="en-US" smtClean="0"/>
-              <a:t>2026/6/4</a:t>
+              <a:t>2026/6/22</a:t>
             </a:fld>
             <a:endParaRPr kumimoji="1" lang="ja-JP" altLang="en-US"/>
           </a:p>
@@ -2046,7 +2046,7 @@
           <a:p>
             <a:fld id="{E9CC885B-4903-4D54-9A93-00025F12DED9}" type="datetimeFigureOut">
               <a:rPr kumimoji="1" lang="ja-JP" altLang="en-US" smtClean="0"/>
-              <a:t>2026/6/4</a:t>
+              <a:t>2026/6/22</a:t>
             </a:fld>
             <a:endParaRPr kumimoji="1" lang="ja-JP" altLang="en-US"/>
           </a:p>
@@ -2187,7 +2187,7 @@
           <a:p>
             <a:fld id="{E9CC885B-4903-4D54-9A93-00025F12DED9}" type="datetimeFigureOut">
               <a:rPr kumimoji="1" lang="ja-JP" altLang="en-US" smtClean="0"/>
-              <a:t>2026/6/4</a:t>
+              <a:t>2026/6/22</a:t>
             </a:fld>
             <a:endParaRPr kumimoji="1" lang="ja-JP" altLang="en-US"/>
           </a:p>
@@ -2300,7 +2300,7 @@
           <a:p>
             <a:fld id="{E9CC885B-4903-4D54-9A93-00025F12DED9}" type="datetimeFigureOut">
               <a:rPr kumimoji="1" lang="ja-JP" altLang="en-US" smtClean="0"/>
-              <a:t>2026/6/4</a:t>
+              <a:t>2026/6/22</a:t>
             </a:fld>
             <a:endParaRPr kumimoji="1" lang="ja-JP" altLang="en-US"/>
           </a:p>
@@ -2643,7 +2643,7 @@
           <a:p>
             <a:fld id="{E9CC885B-4903-4D54-9A93-00025F12DED9}" type="datetimeFigureOut">
               <a:rPr kumimoji="1" lang="ja-JP" altLang="en-US" smtClean="0"/>
-              <a:t>2026/6/4</a:t>
+              <a:t>2026/6/22</a:t>
             </a:fld>
             <a:endParaRPr kumimoji="1" lang="ja-JP" altLang="en-US"/>
           </a:p>
@@ -2931,7 +2931,7 @@
           <a:p>
             <a:fld id="{E9CC885B-4903-4D54-9A93-00025F12DED9}" type="datetimeFigureOut">
               <a:rPr kumimoji="1" lang="ja-JP" altLang="en-US" smtClean="0"/>
-              <a:t>2026/6/4</a:t>
+              <a:t>2026/6/22</a:t>
             </a:fld>
             <a:endParaRPr kumimoji="1" lang="ja-JP" altLang="en-US"/>
           </a:p>
@@ -3204,7 +3204,7 @@
           <a:p>
             <a:fld id="{E9CC885B-4903-4D54-9A93-00025F12DED9}" type="datetimeFigureOut">
               <a:rPr kumimoji="1" lang="ja-JP" altLang="en-US" smtClean="0"/>
-              <a:t>2026/6/4</a:t>
+              <a:t>2026/6/22</a:t>
             </a:fld>
             <a:endParaRPr kumimoji="1" lang="ja-JP" altLang="en-US"/>
           </a:p>
@@ -3937,7 +3937,7 @@
         <p:spPr>
           <a:xfrm>
             <a:off x="567542" y="5017962"/>
-            <a:ext cx="9110186" cy="830997"/>
+            <a:ext cx="10341293" cy="830997"/>
           </a:xfrm>
           <a:prstGeom prst="rect">
             <a:avLst/>
@@ -3960,7 +3960,7 @@
                   <a:srgbClr val="FF0000"/>
                 </a:solidFill>
               </a:rPr>
-              <a:t>ゲーム中に絶対に変わらない固定値</a:t>
+              <a:t>ゲーム中に絶対に変わらない固定値（定数）</a:t>
             </a:r>
             <a:r>
               <a:rPr kumimoji="1" lang="ja-JP" altLang="en-US" sz="2400" dirty="0"/>
@@ -4958,22 +4958,30 @@
           </a:p>
           <a:p>
             <a:r>
+              <a:rPr kumimoji="1" lang="ja-JP" altLang="en-US" sz="2400" b="1" dirty="0">
+                <a:solidFill>
+                  <a:srgbClr val="FF0000"/>
+                </a:solidFill>
+              </a:rPr>
+              <a:t>■ゲーム中に複数使うもの</a:t>
+            </a:r>
+            <a:endParaRPr kumimoji="1" lang="en-US" altLang="ja-JP" sz="2400" b="1" dirty="0">
+              <a:solidFill>
+                <a:srgbClr val="FF0000"/>
+              </a:solidFill>
+            </a:endParaRPr>
+          </a:p>
+          <a:p>
+            <a:r>
+              <a:rPr lang="ja-JP" altLang="en-US" sz="2400" dirty="0"/>
+              <a:t>・敵</a:t>
+            </a:r>
+            <a:endParaRPr lang="en-US" altLang="ja-JP" sz="2400" dirty="0"/>
+          </a:p>
+          <a:p>
+            <a:r>
               <a:rPr kumimoji="1" lang="ja-JP" altLang="en-US" sz="2400" dirty="0"/>
-              <a:t>■似たものの例</a:t>
-            </a:r>
-            <a:endParaRPr kumimoji="1" lang="en-US" altLang="ja-JP" sz="2400" dirty="0"/>
-          </a:p>
-          <a:p>
-            <a:r>
-              <a:rPr lang="ja-JP" altLang="en-US" sz="2400" dirty="0"/>
-              <a:t>・敵キャラクター</a:t>
-            </a:r>
-            <a:endParaRPr lang="en-US" altLang="ja-JP" sz="2400" dirty="0"/>
-          </a:p>
-          <a:p>
-            <a:r>
-              <a:rPr kumimoji="1" lang="ja-JP" altLang="en-US" sz="2400" dirty="0"/>
-              <a:t>・ステージのブロック</a:t>
+              <a:t>・ブロック</a:t>
             </a:r>
             <a:endParaRPr kumimoji="1" lang="en-US" altLang="ja-JP" sz="2400" dirty="0"/>
           </a:p>
@@ -4987,7 +4995,7 @@
           <a:p>
             <a:r>
               <a:rPr kumimoji="1" lang="ja-JP" altLang="en-US" sz="2400" dirty="0"/>
-              <a:t>・シューティングの弾丸</a:t>
+              <a:t>・弾丸</a:t>
             </a:r>
             <a:endParaRPr kumimoji="1" lang="en-US" altLang="ja-JP" sz="2400" dirty="0"/>
           </a:p>
